--- a/curso/pptx/S37.pptx
+++ b/curso/pptx/S37.pptx
@@ -7024,7 +7024,7 @@
                 </a:solidFill>
                 <a:latin typeface="Nunito Sans"/>
               </a:rPr>
-              <a:t> = la mitad</a:t>
+              <a:t> = 一半</a:t>
             </a:r>
           </a:p>
           <a:p>
@@ -7058,7 +7058,7 @@
                 </a:solidFill>
                 <a:latin typeface="Nunito Sans"/>
               </a:rPr>
-              <a:t> = la cuarta parte</a:t>
+              <a:t> = 四分之一</a:t>
             </a:r>
           </a:p>
           <a:p>
@@ -7092,7 +7092,7 @@
                 </a:solidFill>
                 <a:latin typeface="Nunito Sans"/>
               </a:rPr>
-              <a:t> = todos</a:t>
+              <a:t> = 全部</a:t>
             </a:r>
           </a:p>
           <a:p>
@@ -7117,7 +7117,7 @@
                 </a:solidFill>
                 <a:latin typeface="Nunito Sans"/>
               </a:rPr>
-              <a:t>Siempre es un porcentaje </a:t>
+              <a:t>它永远是</a:t>
             </a:r>
             <a:r>
               <a:rPr sz="2800" b="1">
@@ -7126,7 +7126,16 @@
                 </a:solidFill>
                 <a:latin typeface="Nunito Sans"/>
               </a:rPr>
-              <a:t>de algo</a:t>
+              <a:t>某个东西的</a:t>
+            </a:r>
+            <a:r>
+              <a:rPr sz="2800" b="0">
+                <a:solidFill>
+                  <a:srgbClr val="1F2A44"/>
+                </a:solidFill>
+                <a:latin typeface="Nunito Sans"/>
+              </a:rPr>
+              <a:t>百分比</a:t>
             </a:r>
           </a:p>
         </p:txBody>
@@ -7360,7 +7369,7 @@
                 </a:solidFill>
                 <a:latin typeface="Nunito Sans"/>
               </a:rPr>
-              <a:t>Absoluta:</a:t>
+              <a:t>绝对数：</a:t>
             </a:r>
             <a:r>
               <a:rPr sz="2800" b="0">
@@ -7369,7 +7378,7 @@
                 </a:solidFill>
                 <a:latin typeface="Nunito Sans"/>
               </a:rPr>
-              <a:t> aprobaron 30 alumnos</a:t>
+              <a:t>有30个学生及格</a:t>
             </a:r>
           </a:p>
           <a:p>
@@ -7394,7 +7403,7 @@
                 </a:solidFill>
                 <a:latin typeface="Nunito Sans"/>
               </a:rPr>
-              <a:t>Relativa:</a:t>
+              <a:t>相对数：</a:t>
             </a:r>
             <a:r>
               <a:rPr sz="2800" b="0">
@@ -7403,7 +7412,7 @@
                 </a:solidFill>
                 <a:latin typeface="Nunito Sans"/>
               </a:rPr>
-              <a:t> aprobó el 60 % (30 de 50)</a:t>
+              <a:t>60 %的人及格（50个里有30个）</a:t>
             </a:r>
           </a:p>
           <a:p>
@@ -7428,7 +7437,7 @@
                 </a:solidFill>
                 <a:latin typeface="Nunito Sans"/>
               </a:rPr>
-              <a:t>Hacen falta las dos para entender bien</a:t>
+              <a:t>两个都需要，才能理解清楚</a:t>
             </a:r>
           </a:p>
         </p:txBody>
